--- a/ButtonMap2026.pptx
+++ b/ButtonMap2026.pptx
@@ -5617,8 +5617,8 @@
           </a:xfrm>
           <a:prstGeom prst="wedgeRoundRectCallout">
             <a:avLst>
-              <a:gd name="adj1" fmla="val -95469"/>
-              <a:gd name="adj2" fmla="val -114382"/>
+              <a:gd name="adj1" fmla="val -110392"/>
+              <a:gd name="adj2" fmla="val -162933"/>
               <a:gd name="adj3" fmla="val 0"/>
             </a:avLst>
           </a:prstGeom>
@@ -5864,16 +5864,7 @@
                 <a:cs typeface="Press Start 2P"/>
                 <a:sym typeface="Press Start 2P"/>
               </a:rPr>
-              <a:t>Forward and </a:t>
-            </a:r>
-            <a:r>
-              <a:rPr lang="en" sz="724" dirty="0" smtClean="0">
-                <a:latin typeface="Press Start 2P"/>
-                <a:ea typeface="Press Start 2P"/>
-                <a:cs typeface="Press Start 2P"/>
-                <a:sym typeface="Press Start 2P"/>
-              </a:rPr>
-              <a:t>Reverse</a:t>
+              <a:t>Forward and Reverse</a:t>
             </a:r>
             <a:endParaRPr sz="724" dirty="0">
               <a:latin typeface="Press Start 2P"/>
@@ -5937,16 +5928,7 @@
                 <a:cs typeface="Press Start 2P"/>
                 <a:sym typeface="Press Start 2P"/>
               </a:rPr>
-              <a:t>Left and </a:t>
-            </a:r>
-            <a:r>
-              <a:rPr lang="en" sz="724" dirty="0" smtClean="0">
-                <a:latin typeface="Press Start 2P"/>
-                <a:ea typeface="Press Start 2P"/>
-                <a:cs typeface="Press Start 2P"/>
-                <a:sym typeface="Press Start 2P"/>
-              </a:rPr>
-              <a:t>Right</a:t>
+              <a:t>Left and Right</a:t>
             </a:r>
             <a:endParaRPr sz="724" dirty="0">
               <a:latin typeface="Press Start 2P"/>
@@ -6266,8 +6248,8 @@
           </a:xfrm>
           <a:prstGeom prst="wedgeRoundRectCallout">
             <a:avLst>
-              <a:gd name="adj1" fmla="val -113255"/>
-              <a:gd name="adj2" fmla="val -52520"/>
+              <a:gd name="adj1" fmla="val -126027"/>
+              <a:gd name="adj2" fmla="val -71015"/>
               <a:gd name="adj3" fmla="val 0"/>
             </a:avLst>
           </a:prstGeom>
@@ -6356,7 +6338,7 @@
           </a:xfrm>
           <a:prstGeom prst="wedgeRoundRectCallout">
             <a:avLst>
-              <a:gd name="adj1" fmla="val -94324"/>
+              <a:gd name="adj1" fmla="val -115579"/>
               <a:gd name="adj2" fmla="val 15734"/>
               <a:gd name="adj3" fmla="val 0"/>
             </a:avLst>
@@ -6447,10 +6429,9 @@
           <a:lstStyle/>
           <a:p>
             <a:r>
-              <a:rPr lang="en-US" sz="3200" b="1" i="1" dirty="0" smtClean="0"/>
+              <a:rPr lang="en-US" sz="3200" b="1" i="1" dirty="0"/>
               <a:t>2026 Control Button Mapping</a:t>
             </a:r>
-            <a:endParaRPr lang="en-US" sz="3200" b="1" i="1" dirty="0"/>
           </a:p>
         </p:txBody>
       </p:sp>

--- a/ButtonMap2026.pptx
+++ b/ButtonMap2026.pptx
@@ -6108,7 +6108,7 @@
                 <a:cs typeface="Press Start 2P"/>
                 <a:sym typeface="Press Start 2P"/>
               </a:rPr>
-              <a:t>Fast Launch</a:t>
+              <a:t>Launch</a:t>
             </a:r>
             <a:endParaRPr sz="676" dirty="0">
               <a:latin typeface="Press Start 2P"/>
@@ -6153,13 +6153,13 @@
         </p:nvSpPr>
         <p:spPr>
           <a:xfrm>
-            <a:off x="4395285" y="1019591"/>
+            <a:off x="7560064" y="4028486"/>
             <a:ext cx="1236648" cy="376386"/>
           </a:xfrm>
           <a:prstGeom prst="wedgeRoundRectCallout">
             <a:avLst>
-              <a:gd name="adj1" fmla="val 105520"/>
-              <a:gd name="adj2" fmla="val 33333"/>
+              <a:gd name="adj1" fmla="val -45165"/>
+              <a:gd name="adj2" fmla="val -159916"/>
               <a:gd name="adj3" fmla="val 0"/>
             </a:avLst>
           </a:prstGeom>
@@ -6192,13 +6192,13 @@
               <a:buNone/>
             </a:pPr>
             <a:r>
-              <a:rPr lang="en" sz="676" dirty="0">
+              <a:rPr lang="en-US" sz="676" dirty="0">
                 <a:latin typeface="Press Start 2P"/>
                 <a:ea typeface="Press Start 2P"/>
                 <a:cs typeface="Press Start 2P"/>
                 <a:sym typeface="Press Start 2P"/>
               </a:rPr>
-              <a:t>Slow Launch</a:t>
+              <a:t>Launch Speed Adjust</a:t>
             </a:r>
             <a:endParaRPr sz="676" dirty="0">
               <a:latin typeface="Press Start 2P"/>
@@ -6224,7 +6224,7 @@
                 <a:cs typeface="Press Start 2P"/>
                 <a:sym typeface="Press Start 2P"/>
               </a:rPr>
-              <a:t>(button 5)</a:t>
+              <a:t>(axis 3)</a:t>
             </a:r>
             <a:endParaRPr sz="676" dirty="0">
               <a:latin typeface="Press Start 2P"/>
@@ -6327,87 +6327,6 @@
       </p:sp>
       <p:sp>
         <p:nvSpPr>
-          <p:cNvPr id="65" name="Google Shape;65;p13"/>
-          <p:cNvSpPr/>
-          <p:nvPr/>
-        </p:nvSpPr>
-        <p:spPr>
-          <a:xfrm>
-            <a:off x="7498260" y="930741"/>
-            <a:ext cx="1151748" cy="376386"/>
-          </a:xfrm>
-          <a:prstGeom prst="wedgeRoundRectCallout">
-            <a:avLst>
-              <a:gd name="adj1" fmla="val -115579"/>
-              <a:gd name="adj2" fmla="val 15734"/>
-              <a:gd name="adj3" fmla="val 0"/>
-            </a:avLst>
-          </a:prstGeom>
-          <a:solidFill>
-            <a:schemeClr val="lt2"/>
-          </a:solidFill>
-          <a:ln w="8075" cap="flat" cmpd="sng">
-            <a:solidFill>
-              <a:schemeClr val="dk2"/>
-            </a:solidFill>
-            <a:prstDash val="solid"/>
-            <a:round/>
-            <a:headEnd type="none" w="sm" len="sm"/>
-            <a:tailEnd type="none" w="sm" len="sm"/>
-          </a:ln>
-        </p:spPr>
-        <p:txBody>
-          <a:bodyPr spcFirstLastPara="1" wrap="square" lIns="77350" tIns="77350" rIns="77350" bIns="77350" anchor="ctr" anchorCtr="0">
-            <a:noAutofit/>
-          </a:bodyPr>
-          <a:lstStyle/>
-          <a:p>
-            <a:pPr marL="0" lvl="0" indent="0" algn="ctr" rtl="0">
-              <a:spcBef>
-                <a:spcPts val="0"/>
-              </a:spcBef>
-              <a:spcAft>
-                <a:spcPts val="0"/>
-              </a:spcAft>
-              <a:buNone/>
-            </a:pPr>
-            <a:endParaRPr sz="676" dirty="0">
-              <a:latin typeface="Press Start 2P"/>
-              <a:ea typeface="Press Start 2P"/>
-              <a:cs typeface="Press Start 2P"/>
-              <a:sym typeface="Press Start 2P"/>
-            </a:endParaRPr>
-          </a:p>
-          <a:p>
-            <a:pPr marL="0" lvl="0" indent="0" algn="ctr" rtl="0">
-              <a:spcBef>
-                <a:spcPts val="0"/>
-              </a:spcBef>
-              <a:spcAft>
-                <a:spcPts val="0"/>
-              </a:spcAft>
-              <a:buNone/>
-            </a:pPr>
-            <a:r>
-              <a:rPr lang="en" sz="676" dirty="0">
-                <a:latin typeface="Press Start 2P"/>
-                <a:ea typeface="Press Start 2P"/>
-                <a:cs typeface="Press Start 2P"/>
-                <a:sym typeface="Press Start 2P"/>
-              </a:rPr>
-              <a:t>(button 6)</a:t>
-            </a:r>
-            <a:endParaRPr sz="676" dirty="0">
-              <a:latin typeface="Press Start 2P"/>
-              <a:ea typeface="Press Start 2P"/>
-              <a:cs typeface="Press Start 2P"/>
-              <a:sym typeface="Press Start 2P"/>
-            </a:endParaRPr>
-          </a:p>
-        </p:txBody>
-      </p:sp>
-      <p:sp>
-        <p:nvSpPr>
           <p:cNvPr id="2" name="TextBox 1"/>
           <p:cNvSpPr txBox="1"/>
           <p:nvPr/>
@@ -6415,7 +6334,7 @@
         <p:spPr>
           <a:xfrm>
             <a:off x="441960" y="53340"/>
-            <a:ext cx="5068095" cy="1077218"/>
+            <a:ext cx="6644640" cy="584775"/>
           </a:xfrm>
           <a:prstGeom prst="rect">
             <a:avLst/>
@@ -6432,6 +6351,76 @@
               <a:rPr lang="en-US" sz="3200" b="1" i="1" dirty="0"/>
               <a:t>2026 Control Button Mapping</a:t>
             </a:r>
+          </a:p>
+        </p:txBody>
+      </p:sp>
+      <p:sp>
+        <p:nvSpPr>
+          <p:cNvPr id="4" name="Google Shape;58;p13">
+            <a:extLst>
+              <a:ext uri="{FF2B5EF4-FFF2-40B4-BE49-F238E27FC236}">
+                <a16:creationId xmlns:a16="http://schemas.microsoft.com/office/drawing/2014/main" id="{4F7ED2CF-2ABE-EB43-D7C2-0BA0ED023F7E}"/>
+              </a:ext>
+            </a:extLst>
+          </p:cNvPr>
+          <p:cNvSpPr/>
+          <p:nvPr/>
+        </p:nvSpPr>
+        <p:spPr>
+          <a:xfrm>
+            <a:off x="105550" y="774311"/>
+            <a:ext cx="1050600" cy="700500"/>
+          </a:xfrm>
+          <a:prstGeom prst="wedgeRoundRectCallout">
+            <a:avLst>
+              <a:gd name="adj1" fmla="val 34804"/>
+              <a:gd name="adj2" fmla="val 80537"/>
+              <a:gd name="adj3" fmla="val 0"/>
+            </a:avLst>
+          </a:prstGeom>
+          <a:solidFill>
+            <a:schemeClr val="lt2"/>
+          </a:solidFill>
+          <a:ln w="8650" cap="flat" cmpd="sng">
+            <a:solidFill>
+              <a:schemeClr val="dk2"/>
+            </a:solidFill>
+            <a:prstDash val="solid"/>
+            <a:round/>
+            <a:headEnd type="none" w="sm" len="sm"/>
+            <a:tailEnd type="none" w="sm" len="sm"/>
+          </a:ln>
+        </p:spPr>
+        <p:txBody>
+          <a:bodyPr spcFirstLastPara="1" wrap="square" lIns="82850" tIns="82850" rIns="82850" bIns="82850" anchor="ctr" anchorCtr="0">
+            <a:noAutofit/>
+          </a:bodyPr>
+          <a:lstStyle/>
+          <a:p>
+            <a:pPr marL="0" lvl="0" indent="0" algn="ctr" rtl="0">
+              <a:spcBef>
+                <a:spcPts val="0"/>
+              </a:spcBef>
+              <a:spcAft>
+                <a:spcPts val="0"/>
+              </a:spcAft>
+              <a:buNone/>
+            </a:pPr>
+            <a:r>
+              <a:rPr lang="en" sz="724" dirty="0">
+                <a:latin typeface="Press Start 2P"/>
+                <a:ea typeface="Press Start 2P"/>
+                <a:cs typeface="Press Start 2P"/>
+                <a:sym typeface="Press Start 2P"/>
+              </a:rPr>
+              <a:t>Speed Boost</a:t>
+            </a:r>
+            <a:endParaRPr sz="724" dirty="0">
+              <a:latin typeface="Press Start 2P"/>
+              <a:ea typeface="Press Start 2P"/>
+              <a:cs typeface="Press Start 2P"/>
+              <a:sym typeface="Press Start 2P"/>
+            </a:endParaRPr>
           </a:p>
         </p:txBody>
       </p:sp>
